--- a/logo.pptx
+++ b/logo.pptx
@@ -2968,94 +2968,115 @@
           <a:chExt cx="0" cy="0"/>
         </a:xfrm>
       </p:grpSpPr>
-      <p:sp>
-        <p:nvSpPr>
-          <p:cNvPr id="10" name="Oval 9">
+      <p:grpSp>
+        <p:nvGrpSpPr>
+          <p:cNvPr id="13" name="Group 12">
             <a:extLst>
               <a:ext uri="{FF2B5EF4-FFF2-40B4-BE49-F238E27FC236}">
-                <a16:creationId xmlns:a16="http://schemas.microsoft.com/office/drawing/2014/main" id="{743D659F-6EB6-FAA2-30D9-5D4CDFB7B067}"/>
+                <a16:creationId xmlns:a16="http://schemas.microsoft.com/office/drawing/2014/main" id="{74642438-181D-4997-D47B-F8CFAEE7DE77}"/>
               </a:ext>
             </a:extLst>
           </p:cNvPr>
-          <p:cNvSpPr/>
+          <p:cNvGrpSpPr/>
           <p:nvPr/>
-        </p:nvSpPr>
-        <p:spPr>
+        </p:nvGrpSpPr>
+        <p:grpSpPr>
           <a:xfrm>
-            <a:off x="215900" y="215900"/>
-            <a:ext cx="1003300" cy="1003300"/>
+            <a:off x="-180000" y="-180000"/>
+            <a:ext cx="1800000" cy="1800000"/>
+            <a:chOff x="-180000" y="-180000"/>
+            <a:chExt cx="1800000" cy="1800000"/>
           </a:xfrm>
-          <a:prstGeom prst="ellipse">
-            <a:avLst/>
-          </a:prstGeom>
-          <a:solidFill>
-            <a:srgbClr val="FFF400"/>
-          </a:solidFill>
-          <a:ln>
-            <a:noFill/>
-          </a:ln>
-        </p:spPr>
-        <p:style>
-          <a:lnRef idx="2">
-            <a:schemeClr val="accent1">
-              <a:shade val="15000"/>
-            </a:schemeClr>
-          </a:lnRef>
-          <a:fillRef idx="1">
-            <a:schemeClr val="accent1"/>
-          </a:fillRef>
-          <a:effectRef idx="0">
-            <a:schemeClr val="accent1"/>
-          </a:effectRef>
-          <a:fontRef idx="minor">
-            <a:schemeClr val="lt1"/>
-          </a:fontRef>
-        </p:style>
-        <p:txBody>
-          <a:bodyPr rtlCol="0" anchor="ctr"/>
-          <a:lstStyle/>
-          <a:p>
-            <a:pPr algn="ctr"/>
-            <a:endParaRPr lang="en-CA"/>
-          </a:p>
-        </p:txBody>
-      </p:sp>
-      <p:pic>
-        <p:nvPicPr>
-          <p:cNvPr id="9" name="Graphic 8" descr="Badge Tick1 with solid fill">
-            <a:extLst>
-              <a:ext uri="{FF2B5EF4-FFF2-40B4-BE49-F238E27FC236}">
-                <a16:creationId xmlns:a16="http://schemas.microsoft.com/office/drawing/2014/main" id="{8F068D10-3FE2-FDF0-EB5C-1927C07F1C83}"/>
-              </a:ext>
-            </a:extLst>
-          </p:cNvPr>
-          <p:cNvPicPr>
-            <a:picLocks noChangeAspect="1"/>
-          </p:cNvPicPr>
-          <p:nvPr/>
-        </p:nvPicPr>
-        <p:blipFill>
-          <a:blip r:embed="rId2">
-            <a:extLst>
-              <a:ext uri="{96DAC541-7B7A-43D3-8B79-37D633B846F1}">
-                <asvg:svgBlip xmlns:asvg="http://schemas.microsoft.com/office/drawing/2016/SVG/main" r:embed="rId3"/>
-              </a:ext>
-            </a:extLst>
-          </a:blip>
-          <a:stretch>
-            <a:fillRect/>
-          </a:stretch>
-        </p:blipFill>
-        <p:spPr>
-          <a:xfrm>
-            <a:off x="-1" y="-1"/>
-            <a:ext cx="1439863" cy="1439863"/>
-          </a:xfrm>
-          <a:prstGeom prst="rect">
-            <a:avLst/>
-          </a:prstGeom>
-        </p:spPr>
-      </p:pic>
+        </p:grpSpPr>
+        <p:sp>
+          <p:nvSpPr>
+            <p:cNvPr id="10" name="Oval 9">
+              <a:extLst>
+                <a:ext uri="{FF2B5EF4-FFF2-40B4-BE49-F238E27FC236}">
+                  <a16:creationId xmlns:a16="http://schemas.microsoft.com/office/drawing/2014/main" id="{743D659F-6EB6-FAA2-30D9-5D4CDFB7B067}"/>
+                </a:ext>
+              </a:extLst>
+            </p:cNvPr>
+            <p:cNvSpPr/>
+            <p:nvPr/>
+          </p:nvSpPr>
+          <p:spPr>
+            <a:xfrm>
+              <a:off x="177800" y="139700"/>
+              <a:ext cx="1123950" cy="1123950"/>
+            </a:xfrm>
+            <a:prstGeom prst="ellipse">
+              <a:avLst/>
+            </a:prstGeom>
+            <a:solidFill>
+              <a:srgbClr val="FFF400"/>
+            </a:solidFill>
+            <a:ln>
+              <a:noFill/>
+            </a:ln>
+          </p:spPr>
+          <p:style>
+            <a:lnRef idx="2">
+              <a:schemeClr val="accent1">
+                <a:shade val="15000"/>
+              </a:schemeClr>
+            </a:lnRef>
+            <a:fillRef idx="1">
+              <a:schemeClr val="accent1"/>
+            </a:fillRef>
+            <a:effectRef idx="0">
+              <a:schemeClr val="accent1"/>
+            </a:effectRef>
+            <a:fontRef idx="minor">
+              <a:schemeClr val="lt1"/>
+            </a:fontRef>
+          </p:style>
+          <p:txBody>
+            <a:bodyPr rtlCol="0" anchor="ctr"/>
+            <a:lstStyle/>
+            <a:p>
+              <a:pPr algn="ctr"/>
+              <a:endParaRPr lang="en-CA"/>
+            </a:p>
+          </p:txBody>
+        </p:sp>
+        <p:pic>
+          <p:nvPicPr>
+            <p:cNvPr id="9" name="Graphic 8" descr="Badge Tick1 with solid fill">
+              <a:extLst>
+                <a:ext uri="{FF2B5EF4-FFF2-40B4-BE49-F238E27FC236}">
+                  <a16:creationId xmlns:a16="http://schemas.microsoft.com/office/drawing/2014/main" id="{8F068D10-3FE2-FDF0-EB5C-1927C07F1C83}"/>
+                </a:ext>
+              </a:extLst>
+            </p:cNvPr>
+            <p:cNvPicPr>
+              <a:picLocks noChangeAspect="1"/>
+            </p:cNvPicPr>
+            <p:nvPr/>
+          </p:nvPicPr>
+          <p:blipFill>
+            <a:blip r:embed="rId2">
+              <a:extLst>
+                <a:ext uri="{96DAC541-7B7A-43D3-8B79-37D633B846F1}">
+                  <asvg:svgBlip xmlns:asvg="http://schemas.microsoft.com/office/drawing/2016/SVG/main" r:embed="rId3"/>
+                </a:ext>
+              </a:extLst>
+            </a:blip>
+            <a:stretch>
+              <a:fillRect/>
+            </a:stretch>
+          </p:blipFill>
+          <p:spPr>
+            <a:xfrm>
+              <a:off x="-180000" y="-180000"/>
+              <a:ext cx="1800000" cy="1800000"/>
+            </a:xfrm>
+            <a:prstGeom prst="rect">
+              <a:avLst/>
+            </a:prstGeom>
+          </p:spPr>
+        </p:pic>
+      </p:grpSp>
     </p:spTree>
     <p:extLst>
       <p:ext uri="{BB962C8B-B14F-4D97-AF65-F5344CB8AC3E}">

--- a/logo.pptx
+++ b/logo.pptx
@@ -104,6 +104,22 @@
       </a:defRPr>
     </a:lvl9pPr>
   </p:defaultTextStyle>
+  <p:extLst>
+    <p:ext uri="{EFAFB233-063F-42B5-8137-9DF3F51BA10A}">
+      <p15:sldGuideLst xmlns:p15="http://schemas.microsoft.com/office/powerpoint/2012/main">
+        <p15:guide id="1" orient="horz" pos="453" userDrawn="1">
+          <p15:clr>
+            <a:srgbClr val="A4A3A4"/>
+          </p15:clr>
+        </p15:guide>
+        <p15:guide id="2" pos="453" userDrawn="1">
+          <p15:clr>
+            <a:srgbClr val="A4A3A4"/>
+          </p15:clr>
+        </p15:guide>
+      </p15:sldGuideLst>
+    </p:ext>
+  </p:extLst>
 </p:presentation>
 </file>
 
@@ -2982,11 +2998,14 @@
         </p:nvGrpSpPr>
         <p:grpSpPr>
           <a:xfrm>
-            <a:off x="-180000" y="-180000"/>
-            <a:ext cx="1800000" cy="1800000"/>
+            <a:off x="414338" y="414338"/>
+            <a:ext cx="609600" cy="609600"/>
             <a:chOff x="-180000" y="-180000"/>
             <a:chExt cx="1800000" cy="1800000"/>
           </a:xfrm>
+          <a:solidFill>
+            <a:srgbClr val="296CF6"/>
+          </a:solidFill>
         </p:grpSpPr>
         <p:sp>
           <p:nvSpPr>

--- a/logo.pptx
+++ b/logo.pptx
@@ -3028,7 +3028,7 @@
               <a:avLst/>
             </a:prstGeom>
             <a:solidFill>
-              <a:srgbClr val="FFF400"/>
+              <a:schemeClr val="bg1"/>
             </a:solidFill>
             <a:ln>
               <a:noFill/>
